--- a/JavaScript/01 - Introduction to JavaScript.pptx
+++ b/JavaScript/01 - Introduction to JavaScript.pptx
@@ -263,7 +263,7 @@
             <a:fld id="{86D088FE-3E68-47FE-8BA4-634CD34BABBC}" type="datetimeFigureOut">
               <a:rPr lang="en-GB" smtClean="0"/>
               <a:pPr/>
-              <a:t>12/06/2025</a:t>
+              <a:t>16/06/2026</a:t>
             </a:fld>
             <a:endParaRPr lang="en-GB"/>
           </a:p>
@@ -435,7 +435,7 @@
             <a:fld id="{1D6B66C6-1E92-0F4E-A300-9D4ED1F0C23F}" type="datetimeFigureOut">
               <a:rPr lang="en-GB" smtClean="0"/>
               <a:pPr/>
-              <a:t>12/06/2025</a:t>
+              <a:t>16/06/2026</a:t>
             </a:fld>
             <a:endParaRPr lang="en-GB"/>
           </a:p>
@@ -1019,7 +1019,416 @@
           <a:bodyPr/>
           <a:lstStyle/>
           <a:p>
-            <a:endParaRPr lang="en-IN"/>
+            <a:r>
+              <a:rPr lang="en-GB" sz="1200" kern="1200" dirty="0" err="1">
+                <a:solidFill>
+                  <a:schemeClr val="tx1"/>
+                </a:solidFill>
+                <a:latin typeface="Montserrat" panose="00000500000000000000" pitchFamily="2" charset="0"/>
+                <a:ea typeface="+mn-ea"/>
+                <a:cs typeface="+mn-cs"/>
+              </a:rPr>
+              <a:t>console.warn</a:t>
+            </a:r>
+            <a:r>
+              <a:rPr lang="en-GB" sz="1200" kern="1200" dirty="0">
+                <a:solidFill>
+                  <a:schemeClr val="tx1"/>
+                </a:solidFill>
+                <a:latin typeface="Montserrat" panose="00000500000000000000" pitchFamily="2" charset="0"/>
+                <a:ea typeface="+mn-ea"/>
+                <a:cs typeface="+mn-cs"/>
+              </a:rPr>
+              <a:t>("This might be a problem");</a:t>
+            </a:r>
+          </a:p>
+          <a:p>
+            <a:r>
+              <a:rPr lang="en-GB" sz="1200" kern="1200" dirty="0" err="1">
+                <a:solidFill>
+                  <a:schemeClr val="tx1"/>
+                </a:solidFill>
+                <a:latin typeface="Montserrat" panose="00000500000000000000" pitchFamily="2" charset="0"/>
+                <a:ea typeface="+mn-ea"/>
+                <a:cs typeface="+mn-cs"/>
+              </a:rPr>
+              <a:t>console.error</a:t>
+            </a:r>
+            <a:r>
+              <a:rPr lang="en-GB" sz="1200" kern="1200" dirty="0">
+                <a:solidFill>
+                  <a:schemeClr val="tx1"/>
+                </a:solidFill>
+                <a:latin typeface="Montserrat" panose="00000500000000000000" pitchFamily="2" charset="0"/>
+                <a:ea typeface="+mn-ea"/>
+                <a:cs typeface="+mn-cs"/>
+              </a:rPr>
+              <a:t>("This IS an ERROR");</a:t>
+            </a:r>
+          </a:p>
+          <a:p>
+            <a:endParaRPr lang="en-GB" sz="1200" kern="1200" dirty="0">
+              <a:solidFill>
+                <a:schemeClr val="tx1"/>
+              </a:solidFill>
+              <a:latin typeface="Montserrat" panose="00000500000000000000" pitchFamily="2" charset="0"/>
+              <a:ea typeface="+mn-ea"/>
+              <a:cs typeface="+mn-cs"/>
+            </a:endParaRPr>
+          </a:p>
+          <a:p>
+            <a:r>
+              <a:rPr lang="en-GB" sz="1200" kern="1200" dirty="0">
+                <a:solidFill>
+                  <a:schemeClr val="tx1"/>
+                </a:solidFill>
+                <a:latin typeface="Montserrat" panose="00000500000000000000" pitchFamily="2" charset="0"/>
+                <a:ea typeface="+mn-ea"/>
+                <a:cs typeface="+mn-cs"/>
+              </a:rPr>
+              <a:t>let x = 100;</a:t>
+            </a:r>
+          </a:p>
+          <a:p>
+            <a:r>
+              <a:rPr lang="en-GB" sz="1200" kern="1200" dirty="0">
+                <a:solidFill>
+                  <a:schemeClr val="tx1"/>
+                </a:solidFill>
+                <a:latin typeface="Montserrat" panose="00000500000000000000" pitchFamily="2" charset="0"/>
+                <a:ea typeface="+mn-ea"/>
+                <a:cs typeface="+mn-cs"/>
+              </a:rPr>
+              <a:t>console.log("x = ", x);</a:t>
+            </a:r>
+          </a:p>
+          <a:p>
+            <a:endParaRPr lang="en-GB" sz="1200" kern="1200" dirty="0">
+              <a:solidFill>
+                <a:schemeClr val="tx1"/>
+              </a:solidFill>
+              <a:latin typeface="Montserrat" panose="00000500000000000000" pitchFamily="2" charset="0"/>
+              <a:ea typeface="+mn-ea"/>
+              <a:cs typeface="+mn-cs"/>
+            </a:endParaRPr>
+          </a:p>
+          <a:p>
+            <a:r>
+              <a:rPr lang="en-GB" sz="1200" kern="1200" dirty="0">
+                <a:solidFill>
+                  <a:schemeClr val="tx1"/>
+                </a:solidFill>
+                <a:latin typeface="Montserrat" panose="00000500000000000000" pitchFamily="2" charset="0"/>
+                <a:ea typeface="+mn-ea"/>
+                <a:cs typeface="+mn-cs"/>
+              </a:rPr>
+              <a:t>console.log("User %s has %d points", "Mike", 120);</a:t>
+            </a:r>
+          </a:p>
+          <a:p>
+            <a:endParaRPr lang="en-GB" sz="1200" kern="1200" dirty="0">
+              <a:solidFill>
+                <a:schemeClr val="tx1"/>
+              </a:solidFill>
+              <a:latin typeface="Montserrat" panose="00000500000000000000" pitchFamily="2" charset="0"/>
+              <a:ea typeface="+mn-ea"/>
+              <a:cs typeface="+mn-cs"/>
+            </a:endParaRPr>
+          </a:p>
+          <a:p>
+            <a:r>
+              <a:rPr lang="en-GB" sz="1200" kern="1200" dirty="0">
+                <a:solidFill>
+                  <a:schemeClr val="tx1"/>
+                </a:solidFill>
+                <a:latin typeface="Montserrat" panose="00000500000000000000" pitchFamily="2" charset="0"/>
+                <a:ea typeface="+mn-ea"/>
+                <a:cs typeface="+mn-cs"/>
+              </a:rPr>
+              <a:t>// </a:t>
+            </a:r>
+            <a:r>
+              <a:rPr lang="en-GB" sz="1200" kern="1200" dirty="0" err="1">
+                <a:solidFill>
+                  <a:schemeClr val="tx1"/>
+                </a:solidFill>
+                <a:latin typeface="Montserrat" panose="00000500000000000000" pitchFamily="2" charset="0"/>
+                <a:ea typeface="+mn-ea"/>
+                <a:cs typeface="+mn-cs"/>
+              </a:rPr>
+              <a:t>console.clear</a:t>
+            </a:r>
+            <a:r>
+              <a:rPr lang="en-GB" sz="1200" kern="1200" dirty="0">
+                <a:solidFill>
+                  <a:schemeClr val="tx1"/>
+                </a:solidFill>
+                <a:latin typeface="Montserrat" panose="00000500000000000000" pitchFamily="2" charset="0"/>
+                <a:ea typeface="+mn-ea"/>
+                <a:cs typeface="+mn-cs"/>
+              </a:rPr>
+              <a:t>();</a:t>
+            </a:r>
+          </a:p>
+          <a:p>
+            <a:endParaRPr lang="en-GB" sz="1200" kern="1200" dirty="0">
+              <a:solidFill>
+                <a:schemeClr val="tx1"/>
+              </a:solidFill>
+              <a:latin typeface="Montserrat" panose="00000500000000000000" pitchFamily="2" charset="0"/>
+              <a:ea typeface="+mn-ea"/>
+              <a:cs typeface="+mn-cs"/>
+            </a:endParaRPr>
+          </a:p>
+          <a:p>
+            <a:r>
+              <a:rPr lang="en-GB" sz="1200" kern="1200" dirty="0" err="1">
+                <a:solidFill>
+                  <a:schemeClr val="tx1"/>
+                </a:solidFill>
+                <a:latin typeface="Montserrat" panose="00000500000000000000" pitchFamily="2" charset="0"/>
+                <a:ea typeface="+mn-ea"/>
+                <a:cs typeface="+mn-cs"/>
+              </a:rPr>
+              <a:t>console.time</a:t>
+            </a:r>
+            <a:r>
+              <a:rPr lang="en-GB" sz="1200" kern="1200" dirty="0">
+                <a:solidFill>
+                  <a:schemeClr val="tx1"/>
+                </a:solidFill>
+                <a:latin typeface="Montserrat" panose="00000500000000000000" pitchFamily="2" charset="0"/>
+                <a:ea typeface="+mn-ea"/>
+                <a:cs typeface="+mn-cs"/>
+              </a:rPr>
+              <a:t>("loop");</a:t>
+            </a:r>
+          </a:p>
+          <a:p>
+            <a:r>
+              <a:rPr lang="en-GB" sz="1200" kern="1200" dirty="0">
+                <a:solidFill>
+                  <a:schemeClr val="tx1"/>
+                </a:solidFill>
+                <a:latin typeface="Montserrat" panose="00000500000000000000" pitchFamily="2" charset="0"/>
+                <a:ea typeface="+mn-ea"/>
+                <a:cs typeface="+mn-cs"/>
+              </a:rPr>
+              <a:t>for (let </a:t>
+            </a:r>
+            <a:r>
+              <a:rPr lang="en-GB" sz="1200" kern="1200" dirty="0" err="1">
+                <a:solidFill>
+                  <a:schemeClr val="tx1"/>
+                </a:solidFill>
+                <a:latin typeface="Montserrat" panose="00000500000000000000" pitchFamily="2" charset="0"/>
+                <a:ea typeface="+mn-ea"/>
+                <a:cs typeface="+mn-cs"/>
+              </a:rPr>
+              <a:t>i</a:t>
+            </a:r>
+            <a:r>
+              <a:rPr lang="en-GB" sz="1200" kern="1200" dirty="0">
+                <a:solidFill>
+                  <a:schemeClr val="tx1"/>
+                </a:solidFill>
+                <a:latin typeface="Montserrat" panose="00000500000000000000" pitchFamily="2" charset="0"/>
+                <a:ea typeface="+mn-ea"/>
+                <a:cs typeface="+mn-cs"/>
+              </a:rPr>
+              <a:t> = 0; </a:t>
+            </a:r>
+            <a:r>
+              <a:rPr lang="en-GB" sz="1200" kern="1200" dirty="0" err="1">
+                <a:solidFill>
+                  <a:schemeClr val="tx1"/>
+                </a:solidFill>
+                <a:latin typeface="Montserrat" panose="00000500000000000000" pitchFamily="2" charset="0"/>
+                <a:ea typeface="+mn-ea"/>
+                <a:cs typeface="+mn-cs"/>
+              </a:rPr>
+              <a:t>i</a:t>
+            </a:r>
+            <a:r>
+              <a:rPr lang="en-GB" sz="1200" kern="1200" dirty="0">
+                <a:solidFill>
+                  <a:schemeClr val="tx1"/>
+                </a:solidFill>
+                <a:latin typeface="Montserrat" panose="00000500000000000000" pitchFamily="2" charset="0"/>
+                <a:ea typeface="+mn-ea"/>
+                <a:cs typeface="+mn-cs"/>
+              </a:rPr>
+              <a:t> &lt; 1000000; </a:t>
+            </a:r>
+            <a:r>
+              <a:rPr lang="en-GB" sz="1200" kern="1200" dirty="0" err="1">
+                <a:solidFill>
+                  <a:schemeClr val="tx1"/>
+                </a:solidFill>
+                <a:latin typeface="Montserrat" panose="00000500000000000000" pitchFamily="2" charset="0"/>
+                <a:ea typeface="+mn-ea"/>
+                <a:cs typeface="+mn-cs"/>
+              </a:rPr>
+              <a:t>i</a:t>
+            </a:r>
+            <a:r>
+              <a:rPr lang="en-GB" sz="1200" kern="1200" dirty="0">
+                <a:solidFill>
+                  <a:schemeClr val="tx1"/>
+                </a:solidFill>
+                <a:latin typeface="Montserrat" panose="00000500000000000000" pitchFamily="2" charset="0"/>
+                <a:ea typeface="+mn-ea"/>
+                <a:cs typeface="+mn-cs"/>
+              </a:rPr>
+              <a:t>++) { }</a:t>
+            </a:r>
+          </a:p>
+          <a:p>
+            <a:r>
+              <a:rPr lang="en-GB" sz="1200" kern="1200" dirty="0" err="1">
+                <a:solidFill>
+                  <a:schemeClr val="tx1"/>
+                </a:solidFill>
+                <a:latin typeface="Montserrat" panose="00000500000000000000" pitchFamily="2" charset="0"/>
+                <a:ea typeface="+mn-ea"/>
+                <a:cs typeface="+mn-cs"/>
+              </a:rPr>
+              <a:t>console.timeEnd</a:t>
+            </a:r>
+            <a:r>
+              <a:rPr lang="en-GB" sz="1200" kern="1200" dirty="0">
+                <a:solidFill>
+                  <a:schemeClr val="tx1"/>
+                </a:solidFill>
+                <a:latin typeface="Montserrat" panose="00000500000000000000" pitchFamily="2" charset="0"/>
+                <a:ea typeface="+mn-ea"/>
+                <a:cs typeface="+mn-cs"/>
+              </a:rPr>
+              <a:t>("loop");</a:t>
+            </a:r>
+          </a:p>
+          <a:p>
+            <a:endParaRPr lang="en-GB" sz="1200" kern="1200" dirty="0">
+              <a:solidFill>
+                <a:schemeClr val="tx1"/>
+              </a:solidFill>
+              <a:latin typeface="Montserrat" panose="00000500000000000000" pitchFamily="2" charset="0"/>
+              <a:ea typeface="+mn-ea"/>
+              <a:cs typeface="+mn-cs"/>
+            </a:endParaRPr>
+          </a:p>
+          <a:p>
+            <a:r>
+              <a:rPr lang="en-GB" sz="1200" kern="1200" dirty="0" err="1">
+                <a:solidFill>
+                  <a:schemeClr val="tx1"/>
+                </a:solidFill>
+                <a:latin typeface="Montserrat" panose="00000500000000000000" pitchFamily="2" charset="0"/>
+                <a:ea typeface="+mn-ea"/>
+                <a:cs typeface="+mn-cs"/>
+              </a:rPr>
+              <a:t>const</a:t>
+            </a:r>
+            <a:r>
+              <a:rPr lang="en-GB" sz="1200" kern="1200" dirty="0">
+                <a:solidFill>
+                  <a:schemeClr val="tx1"/>
+                </a:solidFill>
+                <a:latin typeface="Montserrat" panose="00000500000000000000" pitchFamily="2" charset="0"/>
+                <a:ea typeface="+mn-ea"/>
+                <a:cs typeface="+mn-cs"/>
+              </a:rPr>
+              <a:t> users = [</a:t>
+            </a:r>
+          </a:p>
+          <a:p>
+            <a:r>
+              <a:rPr lang="en-GB" sz="1200" kern="1200" dirty="0">
+                <a:solidFill>
+                  <a:schemeClr val="tx1"/>
+                </a:solidFill>
+                <a:latin typeface="Montserrat" panose="00000500000000000000" pitchFamily="2" charset="0"/>
+                <a:ea typeface="+mn-ea"/>
+                <a:cs typeface="+mn-cs"/>
+              </a:rPr>
+              <a:t>    { name: "Mike", role: "Instructor", level: 5 },</a:t>
+            </a:r>
+          </a:p>
+          <a:p>
+            <a:r>
+              <a:rPr lang="en-GB" sz="1200" kern="1200" dirty="0">
+                <a:solidFill>
+                  <a:schemeClr val="tx1"/>
+                </a:solidFill>
+                <a:latin typeface="Montserrat" panose="00000500000000000000" pitchFamily="2" charset="0"/>
+                <a:ea typeface="+mn-ea"/>
+                <a:cs typeface="+mn-cs"/>
+              </a:rPr>
+              <a:t>    { name: "Sarah", role: "Developer", level: 3 },</a:t>
+            </a:r>
+          </a:p>
+          <a:p>
+            <a:r>
+              <a:rPr lang="en-GB" sz="1200" kern="1200" dirty="0">
+                <a:solidFill>
+                  <a:schemeClr val="tx1"/>
+                </a:solidFill>
+                <a:latin typeface="Montserrat" panose="00000500000000000000" pitchFamily="2" charset="0"/>
+                <a:ea typeface="+mn-ea"/>
+                <a:cs typeface="+mn-cs"/>
+              </a:rPr>
+              <a:t>    { name: "Tom", role: "Tester", level: 4 }</a:t>
+            </a:r>
+          </a:p>
+          <a:p>
+            <a:r>
+              <a:rPr lang="en-GB" sz="1200" kern="1200" dirty="0">
+                <a:solidFill>
+                  <a:schemeClr val="tx1"/>
+                </a:solidFill>
+                <a:latin typeface="Montserrat" panose="00000500000000000000" pitchFamily="2" charset="0"/>
+                <a:ea typeface="+mn-ea"/>
+                <a:cs typeface="+mn-cs"/>
+              </a:rPr>
+              <a:t>];</a:t>
+            </a:r>
+          </a:p>
+          <a:p>
+            <a:endParaRPr lang="en-GB" sz="1200" kern="1200" dirty="0">
+              <a:solidFill>
+                <a:schemeClr val="tx1"/>
+              </a:solidFill>
+              <a:latin typeface="Montserrat" panose="00000500000000000000" pitchFamily="2" charset="0"/>
+              <a:ea typeface="+mn-ea"/>
+              <a:cs typeface="+mn-cs"/>
+            </a:endParaRPr>
+          </a:p>
+          <a:p>
+            <a:r>
+              <a:rPr lang="en-GB" sz="1200" kern="1200" dirty="0" err="1">
+                <a:solidFill>
+                  <a:schemeClr val="tx1"/>
+                </a:solidFill>
+                <a:latin typeface="Montserrat" panose="00000500000000000000" pitchFamily="2" charset="0"/>
+                <a:ea typeface="+mn-ea"/>
+                <a:cs typeface="+mn-cs"/>
+              </a:rPr>
+              <a:t>console.table</a:t>
+            </a:r>
+            <a:r>
+              <a:rPr lang="en-GB" sz="1200" kern="1200">
+                <a:solidFill>
+                  <a:schemeClr val="tx1"/>
+                </a:solidFill>
+                <a:latin typeface="Montserrat" panose="00000500000000000000" pitchFamily="2" charset="0"/>
+                <a:ea typeface="+mn-ea"/>
+                <a:cs typeface="+mn-cs"/>
+              </a:rPr>
+              <a:t>(users);</a:t>
+            </a:r>
+          </a:p>
+          <a:p>
+            <a:endParaRPr lang="en-GB"/>
           </a:p>
         </p:txBody>
       </p:sp>
@@ -1041,6 +1450,91 @@
             <a:fld id="{548901C6-1DA1-FB44-ABEE-06A0FEB7738E}" type="slidenum">
               <a:rPr lang="en-GB" smtClean="0"/>
               <a:pPr/>
+              <a:t>14</a:t>
+            </a:fld>
+            <a:endParaRPr lang="en-GB"/>
+          </a:p>
+        </p:txBody>
+      </p:sp>
+    </p:spTree>
+    <p:extLst>
+      <p:ext uri="{BB962C8B-B14F-4D97-AF65-F5344CB8AC3E}">
+        <p14:creationId xmlns:p14="http://schemas.microsoft.com/office/powerpoint/2010/main" val="734190065"/>
+      </p:ext>
+    </p:extLst>
+  </p:cSld>
+  <p:clrMapOvr>
+    <a:masterClrMapping/>
+  </p:clrMapOvr>
+</p:notes>
+</file>
+
+<file path=ppt/notesSlides/notesSlide13.xml><?xml version="1.0" encoding="utf-8"?>
+<p:notes xmlns:a="http://schemas.openxmlformats.org/drawingml/2006/main" xmlns:r="http://schemas.openxmlformats.org/officeDocument/2006/relationships" xmlns:p="http://schemas.openxmlformats.org/presentationml/2006/main">
+  <p:cSld>
+    <p:spTree>
+      <p:nvGrpSpPr>
+        <p:cNvPr id="1" name=""/>
+        <p:cNvGrpSpPr/>
+        <p:nvPr/>
+      </p:nvGrpSpPr>
+      <p:grpSpPr>
+        <a:xfrm>
+          <a:off x="0" y="0"/>
+          <a:ext cx="0" cy="0"/>
+          <a:chOff x="0" y="0"/>
+          <a:chExt cx="0" cy="0"/>
+        </a:xfrm>
+      </p:grpSpPr>
+      <p:sp>
+        <p:nvSpPr>
+          <p:cNvPr id="2" name="Slide Image Placeholder 1"/>
+          <p:cNvSpPr>
+            <a:spLocks noGrp="1" noRot="1" noChangeAspect="1"/>
+          </p:cNvSpPr>
+          <p:nvPr>
+            <p:ph type="sldImg"/>
+          </p:nvPr>
+        </p:nvSpPr>
+        <p:spPr/>
+      </p:sp>
+      <p:sp>
+        <p:nvSpPr>
+          <p:cNvPr id="3" name="Notes Placeholder 2"/>
+          <p:cNvSpPr>
+            <a:spLocks noGrp="1"/>
+          </p:cNvSpPr>
+          <p:nvPr>
+            <p:ph type="body" idx="1"/>
+          </p:nvPr>
+        </p:nvSpPr>
+        <p:spPr/>
+        <p:txBody>
+          <a:bodyPr/>
+          <a:lstStyle/>
+          <a:p>
+            <a:endParaRPr lang="en-IN"/>
+          </a:p>
+        </p:txBody>
+      </p:sp>
+      <p:sp>
+        <p:nvSpPr>
+          <p:cNvPr id="4" name="Slide Number Placeholder 3"/>
+          <p:cNvSpPr>
+            <a:spLocks noGrp="1"/>
+          </p:cNvSpPr>
+          <p:nvPr>
+            <p:ph type="sldNum" sz="quarter" idx="5"/>
+          </p:nvPr>
+        </p:nvSpPr>
+        <p:spPr/>
+        <p:txBody>
+          <a:bodyPr/>
+          <a:lstStyle/>
+          <a:p>
+            <a:fld id="{548901C6-1DA1-FB44-ABEE-06A0FEB7738E}" type="slidenum">
+              <a:rPr lang="en-GB" smtClean="0"/>
+              <a:pPr/>
               <a:t>15</a:t>
             </a:fld>
             <a:endParaRPr lang="en-GB"/>
@@ -1060,7 +1554,7 @@
 </p:notes>
 </file>
 
-<file path=ppt/notesSlides/notesSlide13.xml><?xml version="1.0" encoding="utf-8"?>
+<file path=ppt/notesSlides/notesSlide14.xml><?xml version="1.0" encoding="utf-8"?>
 <p:notes xmlns:a="http://schemas.openxmlformats.org/drawingml/2006/main" xmlns:r="http://schemas.openxmlformats.org/officeDocument/2006/relationships" xmlns:p="http://schemas.openxmlformats.org/presentationml/2006/main">
   <p:cSld>
     <p:spTree>
@@ -2437,13 +2931,13 @@
           <p:nvPr userDrawn="1"/>
         </p:nvPicPr>
         <p:blipFill>
-          <a:blip r:embed="rId3">
+          <a:blip>
             <a:extLst>
               <a:ext uri="{28A0092B-C50C-407E-A947-70E740481C1C}">
                 <a14:useLocalDpi xmlns:a14="http://schemas.microsoft.com/office/drawing/2010/main" val="0"/>
               </a:ext>
               <a:ext uri="{96DAC541-7B7A-43D3-8B79-37D633B846F1}">
-                <asvg:svgBlip xmlns:asvg="http://schemas.microsoft.com/office/drawing/2016/SVG/main" r:embed="rId4"/>
+                <asvg:svgBlip xmlns:asvg="http://schemas.microsoft.com/office/drawing/2016/SVG/main" r:embed="rId3"/>
               </a:ext>
             </a:extLst>
           </a:blip>
@@ -10824,13 +11318,13 @@
           <p:nvPr userDrawn="1"/>
         </p:nvPicPr>
         <p:blipFill>
-          <a:blip r:embed="rId3">
+          <a:blip>
             <a:extLst>
               <a:ext uri="{28A0092B-C50C-407E-A947-70E740481C1C}">
                 <a14:useLocalDpi xmlns:a14="http://schemas.microsoft.com/office/drawing/2010/main" val="0"/>
               </a:ext>
               <a:ext uri="{96DAC541-7B7A-43D3-8B79-37D633B846F1}">
-                <asvg:svgBlip xmlns:asvg="http://schemas.microsoft.com/office/drawing/2016/SVG/main" r:embed="rId4"/>
+                <asvg:svgBlip xmlns:asvg="http://schemas.microsoft.com/office/drawing/2016/SVG/main" r:embed="rId3"/>
               </a:ext>
             </a:extLst>
           </a:blip>
@@ -18001,13 +18495,13 @@
           <p:nvPr userDrawn="1"/>
         </p:nvPicPr>
         <p:blipFill>
-          <a:blip r:embed="rId3">
+          <a:blip>
             <a:extLst>
               <a:ext uri="{28A0092B-C50C-407E-A947-70E740481C1C}">
                 <a14:useLocalDpi xmlns:a14="http://schemas.microsoft.com/office/drawing/2010/main" val="0"/>
               </a:ext>
               <a:ext uri="{96DAC541-7B7A-43D3-8B79-37D633B846F1}">
-                <asvg:svgBlip xmlns:asvg="http://schemas.microsoft.com/office/drawing/2016/SVG/main" r:embed="rId4"/>
+                <asvg:svgBlip xmlns:asvg="http://schemas.microsoft.com/office/drawing/2016/SVG/main" r:embed="rId3"/>
               </a:ext>
             </a:extLst>
           </a:blip>
@@ -20628,13 +21122,13 @@
           <p:nvPr userDrawn="1"/>
         </p:nvPicPr>
         <p:blipFill>
-          <a:blip r:embed="rId3">
+          <a:blip>
             <a:extLst>
               <a:ext uri="{28A0092B-C50C-407E-A947-70E740481C1C}">
                 <a14:useLocalDpi xmlns:a14="http://schemas.microsoft.com/office/drawing/2010/main" val="0"/>
               </a:ext>
               <a:ext uri="{96DAC541-7B7A-43D3-8B79-37D633B846F1}">
-                <asvg:svgBlip xmlns:asvg="http://schemas.microsoft.com/office/drawing/2016/SVG/main" r:embed="rId4"/>
+                <asvg:svgBlip xmlns:asvg="http://schemas.microsoft.com/office/drawing/2016/SVG/main" r:embed="rId3"/>
               </a:ext>
             </a:extLst>
           </a:blip>
@@ -21924,13 +22418,13 @@
           <p:nvPr userDrawn="1"/>
         </p:nvPicPr>
         <p:blipFill>
-          <a:blip r:embed="rId3">
+          <a:blip>
             <a:extLst>
               <a:ext uri="{28A0092B-C50C-407E-A947-70E740481C1C}">
                 <a14:useLocalDpi xmlns:a14="http://schemas.microsoft.com/office/drawing/2010/main" val="0"/>
               </a:ext>
               <a:ext uri="{96DAC541-7B7A-43D3-8B79-37D633B846F1}">
-                <asvg:svgBlip xmlns:asvg="http://schemas.microsoft.com/office/drawing/2016/SVG/main" r:embed="rId4"/>
+                <asvg:svgBlip xmlns:asvg="http://schemas.microsoft.com/office/drawing/2016/SVG/main" r:embed="rId3"/>
               </a:ext>
             </a:extLst>
           </a:blip>
@@ -30087,7 +30581,7 @@
           <p:nvPr/>
         </p:nvPicPr>
         <p:blipFill>
-          <a:blip r:embed="rId2"/>
+          <a:blip r:embed="rId3"/>
           <a:stretch>
             <a:fillRect/>
           </a:stretch>
@@ -37388,10 +37882,10 @@
           <p:nvPr/>
         </p:nvPicPr>
         <p:blipFill>
-          <a:blip r:embed="rId8">
+          <a:blip>
             <a:extLst>
               <a:ext uri="{96DAC541-7B7A-43D3-8B79-37D633B846F1}">
-                <asvg:svgBlip xmlns:asvg="http://schemas.microsoft.com/office/drawing/2016/SVG/main" r:embed="rId9"/>
+                <asvg:svgBlip xmlns:asvg="http://schemas.microsoft.com/office/drawing/2016/SVG/main" r:embed="rId8"/>
               </a:ext>
             </a:extLst>
           </a:blip>
@@ -40677,27 +41171,6 @@
 </file>
 
 <file path=customXml/item1.xml><?xml version="1.0" encoding="utf-8"?>
-<?mso-contentType ?>
-<FormTemplates xmlns="http://schemas.microsoft.com/sharepoint/v3/contenttype/forms">
-  <Display>DocumentLibraryForm</Display>
-  <Edit>DocumentLibraryForm</Edit>
-  <New>DocumentLibraryForm</New>
-</FormTemplates>
-</file>
-
-<file path=customXml/item2.xml><?xml version="1.0" encoding="utf-8"?>
-<p:properties xmlns:p="http://schemas.microsoft.com/office/2006/metadata/properties" xmlns:xsi="http://www.w3.org/2001/XMLSchema-instance" xmlns:pc="http://schemas.microsoft.com/office/infopath/2007/PartnerControls">
-  <documentManagement>
-    <BookTypeField0 xmlns="B42EA499-AA80-4ED5-9ED5-37A17D3EB549">
-      <Terms xmlns="http://schemas.microsoft.com/office/infopath/2007/PartnerControls"/>
-    </BookTypeField0>
-    <IsBuildFile xmlns="B42EA499-AA80-4ED5-9ED5-37A17D3EB549" xsi:nil="true"/>
-    <SequenceNumber xmlns="B42EA499-AA80-4ED5-9ED5-37A17D3EB549" xsi:nil="true"/>
-  </documentManagement>
-</p:properties>
-</file>
-
-<file path=customXml/item3.xml><?xml version="1.0" encoding="utf-8"?>
 <ct:contentTypeSchema xmlns:ct="http://schemas.microsoft.com/office/2006/metadata/contentType" xmlns:ma="http://schemas.microsoft.com/office/2006/metadata/properties/metaAttributes" ct:_="" ma:_="" ma:contentTypeName="Courseware" ma:contentTypeID="0x010100F0967B7CEE8D417F966757887D9466FB005CB7CECC996A5B448C70C3215DE65491" ma:contentTypeVersion="0" ma:contentTypeDescription="Base content type which represents courseware documents" ma:contentTypeScope="" ma:versionID="633ed7bf8a9769dc10b8af609c2e65e8">
   <xsd:schema xmlns:xsd="http://www.w3.org/2001/XMLSchema" xmlns:xs="http://www.w3.org/2001/XMLSchema" xmlns:p="http://schemas.microsoft.com/office/2006/metadata/properties" xmlns:ns2="B42EA499-AA80-4ED5-9ED5-37A17D3EB549" targetNamespace="http://schemas.microsoft.com/office/2006/metadata/properties" ma:root="true" ma:fieldsID="6641bdc0935a9ffdc34b1682c1e0febc" ns2:_="">
     <xsd:import namespace="B42EA499-AA80-4ED5-9ED5-37A17D3EB549"/>
@@ -40837,10 +41310,41 @@
 </ct:contentTypeSchema>
 </file>
 
+<file path=customXml/item2.xml><?xml version="1.0" encoding="utf-8"?>
+<p:properties xmlns:p="http://schemas.microsoft.com/office/2006/metadata/properties" xmlns:xsi="http://www.w3.org/2001/XMLSchema-instance" xmlns:pc="http://schemas.microsoft.com/office/infopath/2007/PartnerControls">
+  <documentManagement>
+    <BookTypeField0 xmlns="B42EA499-AA80-4ED5-9ED5-37A17D3EB549">
+      <Terms xmlns="http://schemas.microsoft.com/office/infopath/2007/PartnerControls"/>
+    </BookTypeField0>
+    <IsBuildFile xmlns="B42EA499-AA80-4ED5-9ED5-37A17D3EB549" xsi:nil="true"/>
+    <SequenceNumber xmlns="B42EA499-AA80-4ED5-9ED5-37A17D3EB549" xsi:nil="true"/>
+  </documentManagement>
+</p:properties>
+</file>
+
+<file path=customXml/item3.xml><?xml version="1.0" encoding="utf-8"?>
+<?mso-contentType ?>
+<FormTemplates xmlns="http://schemas.microsoft.com/sharepoint/v3/contenttype/forms">
+  <Display>DocumentLibraryForm</Display>
+  <Edit>DocumentLibraryForm</Edit>
+  <New>DocumentLibraryForm</New>
+</FormTemplates>
+</file>
+
 <file path=customXml/itemProps1.xml><?xml version="1.0" encoding="utf-8"?>
-<ds:datastoreItem xmlns:ds="http://schemas.openxmlformats.org/officeDocument/2006/customXml" ds:itemID="{08ECE0BD-68A2-4D83-9E6F-68CBA0E0358D}">
+<ds:datastoreItem xmlns:ds="http://schemas.openxmlformats.org/officeDocument/2006/customXml" ds:itemID="{68287985-3009-4C92-A4F0-8F1DD3804E09}">
   <ds:schemaRefs>
-    <ds:schemaRef ds:uri="http://schemas.microsoft.com/sharepoint/v3/contenttype/forms"/>
+    <ds:schemaRef ds:uri="http://schemas.microsoft.com/office/2006/metadata/contentType"/>
+    <ds:schemaRef ds:uri="http://schemas.microsoft.com/office/2006/metadata/properties/metaAttributes"/>
+    <ds:schemaRef ds:uri="http://www.w3.org/2001/XMLSchema"/>
+    <ds:schemaRef ds:uri="http://schemas.microsoft.com/office/2006/metadata/properties"/>
+    <ds:schemaRef ds:uri="B42EA499-AA80-4ED5-9ED5-37A17D3EB549"/>
+    <ds:schemaRef ds:uri="http://schemas.microsoft.com/office/2006/documentManagement/types"/>
+    <ds:schemaRef ds:uri="http://schemas.microsoft.com/office/infopath/2007/PartnerControls"/>
+    <ds:schemaRef ds:uri="http://schemas.openxmlformats.org/package/2006/metadata/core-properties"/>
+    <ds:schemaRef ds:uri="http://purl.org/dc/elements/1.1/"/>
+    <ds:schemaRef ds:uri="http://purl.org/dc/terms/"/>
+    <ds:schemaRef ds:uri="http://schemas.microsoft.com/internal/obd"/>
   </ds:schemaRefs>
 </ds:datastoreItem>
 </file>
@@ -40856,19 +41360,9 @@
 </file>
 
 <file path=customXml/itemProps3.xml><?xml version="1.0" encoding="utf-8"?>
-<ds:datastoreItem xmlns:ds="http://schemas.openxmlformats.org/officeDocument/2006/customXml" ds:itemID="{68287985-3009-4C92-A4F0-8F1DD3804E09}">
+<ds:datastoreItem xmlns:ds="http://schemas.openxmlformats.org/officeDocument/2006/customXml" ds:itemID="{08ECE0BD-68A2-4D83-9E6F-68CBA0E0358D}">
   <ds:schemaRefs>
-    <ds:schemaRef ds:uri="http://schemas.microsoft.com/office/2006/metadata/contentType"/>
-    <ds:schemaRef ds:uri="http://schemas.microsoft.com/office/2006/metadata/properties/metaAttributes"/>
-    <ds:schemaRef ds:uri="http://www.w3.org/2001/XMLSchema"/>
-    <ds:schemaRef ds:uri="http://schemas.microsoft.com/office/2006/metadata/properties"/>
-    <ds:schemaRef ds:uri="B42EA499-AA80-4ED5-9ED5-37A17D3EB549"/>
-    <ds:schemaRef ds:uri="http://schemas.microsoft.com/office/2006/documentManagement/types"/>
-    <ds:schemaRef ds:uri="http://schemas.microsoft.com/office/infopath/2007/PartnerControls"/>
-    <ds:schemaRef ds:uri="http://schemas.openxmlformats.org/package/2006/metadata/core-properties"/>
-    <ds:schemaRef ds:uri="http://purl.org/dc/elements/1.1/"/>
-    <ds:schemaRef ds:uri="http://purl.org/dc/terms/"/>
-    <ds:schemaRef ds:uri="http://schemas.microsoft.com/internal/obd"/>
+    <ds:schemaRef ds:uri="http://schemas.microsoft.com/sharepoint/v3/contenttype/forms"/>
   </ds:schemaRefs>
 </ds:datastoreItem>
 </file>